--- a/MyLIfe_ppt최종.pptx
+++ b/MyLIfe_ppt최종.pptx
@@ -169,6 +169,476 @@
     </p:ext>
   </p:extLst>
 </p:presentation>
+</file>
+
+<file path=ppt/changesInfos/changesInfo1.xml><?xml version="1.0" encoding="utf-8"?>
+<pc:chgInfo xmlns:a="http://schemas.openxmlformats.org/drawingml/2006/main" xmlns:r="http://schemas.openxmlformats.org/officeDocument/2006/relationships" xmlns:ac="http://schemas.microsoft.com/office/drawing/2013/main/command" xmlns:pc="http://schemas.microsoft.com/office/powerpoint/2013/main/command">
+  <pc:docChgLst>
+    <pc:chgData name="민석 진" userId="d54531ed81a87222" providerId="LiveId" clId="{5E22E9DC-B28E-40D6-BD6A-809B7C86A552}"/>
+    <pc:docChg chg="modSld">
+      <pc:chgData name="민석 진" userId="d54531ed81a87222" providerId="LiveId" clId="{5E22E9DC-B28E-40D6-BD6A-809B7C86A552}" dt="2026-07-11T02:03:11.718" v="44" actId="208"/>
+      <pc:docMkLst>
+        <pc:docMk/>
+      </pc:docMkLst>
+      <pc:sldChg chg="modSp mod">
+        <pc:chgData name="민석 진" userId="d54531ed81a87222" providerId="LiveId" clId="{5E22E9DC-B28E-40D6-BD6A-809B7C86A552}" dt="2026-07-11T02:01:08.088" v="1" actId="208"/>
+        <pc:sldMkLst>
+          <pc:docMk/>
+          <pc:sldMk cId="839778154" sldId="271"/>
+        </pc:sldMkLst>
+        <pc:picChg chg="mod">
+          <ac:chgData name="민석 진" userId="d54531ed81a87222" providerId="LiveId" clId="{5E22E9DC-B28E-40D6-BD6A-809B7C86A552}" dt="2026-07-11T02:00:53.665" v="0" actId="208"/>
+          <ac:picMkLst>
+            <pc:docMk/>
+            <pc:sldMk cId="839778154" sldId="271"/>
+            <ac:picMk id="25" creationId="{66451BC2-F0B6-E838-A4F6-7C9D36592604}"/>
+          </ac:picMkLst>
+        </pc:picChg>
+        <pc:picChg chg="mod">
+          <ac:chgData name="민석 진" userId="d54531ed81a87222" providerId="LiveId" clId="{5E22E9DC-B28E-40D6-BD6A-809B7C86A552}" dt="2026-07-11T02:01:08.088" v="1" actId="208"/>
+          <ac:picMkLst>
+            <pc:docMk/>
+            <pc:sldMk cId="839778154" sldId="271"/>
+            <ac:picMk id="27" creationId="{0029FCD5-B4A5-495D-2A5D-5B709589BA12}"/>
+          </ac:picMkLst>
+        </pc:picChg>
+      </pc:sldChg>
+      <pc:sldChg chg="modSp mod">
+        <pc:chgData name="민석 진" userId="d54531ed81a87222" providerId="LiveId" clId="{5E22E9DC-B28E-40D6-BD6A-809B7C86A552}" dt="2026-07-11T02:01:18.732" v="4" actId="208"/>
+        <pc:sldMkLst>
+          <pc:docMk/>
+          <pc:sldMk cId="3602110094" sldId="275"/>
+        </pc:sldMkLst>
+        <pc:picChg chg="mod">
+          <ac:chgData name="민석 진" userId="d54531ed81a87222" providerId="LiveId" clId="{5E22E9DC-B28E-40D6-BD6A-809B7C86A552}" dt="2026-07-11T02:01:13.657" v="2" actId="208"/>
+          <ac:picMkLst>
+            <pc:docMk/>
+            <pc:sldMk cId="3602110094" sldId="275"/>
+            <ac:picMk id="7" creationId="{CD3BD709-DF7A-1395-AD1D-EB5B60F39E22}"/>
+          </ac:picMkLst>
+        </pc:picChg>
+        <pc:picChg chg="mod">
+          <ac:chgData name="민석 진" userId="d54531ed81a87222" providerId="LiveId" clId="{5E22E9DC-B28E-40D6-BD6A-809B7C86A552}" dt="2026-07-11T02:01:18.732" v="4" actId="208"/>
+          <ac:picMkLst>
+            <pc:docMk/>
+            <pc:sldMk cId="3602110094" sldId="275"/>
+            <ac:picMk id="17" creationId="{A94A1764-4CE5-D304-D6A3-5EA1D2D5B2DC}"/>
+          </ac:picMkLst>
+        </pc:picChg>
+        <pc:picChg chg="mod">
+          <ac:chgData name="민석 진" userId="d54531ed81a87222" providerId="LiveId" clId="{5E22E9DC-B28E-40D6-BD6A-809B7C86A552}" dt="2026-07-11T02:01:16.625" v="3" actId="208"/>
+          <ac:picMkLst>
+            <pc:docMk/>
+            <pc:sldMk cId="3602110094" sldId="275"/>
+            <ac:picMk id="21" creationId="{8FF4BFFE-457A-EC8B-770A-A4C4BC3F20A8}"/>
+          </ac:picMkLst>
+        </pc:picChg>
+      </pc:sldChg>
+      <pc:sldChg chg="modSp mod">
+        <pc:chgData name="민석 진" userId="d54531ed81a87222" providerId="LiveId" clId="{5E22E9DC-B28E-40D6-BD6A-809B7C86A552}" dt="2026-07-11T02:02:18.856" v="25" actId="208"/>
+        <pc:sldMkLst>
+          <pc:docMk/>
+          <pc:sldMk cId="2054621274" sldId="276"/>
+        </pc:sldMkLst>
+        <pc:picChg chg="mod">
+          <ac:chgData name="민석 진" userId="d54531ed81a87222" providerId="LiveId" clId="{5E22E9DC-B28E-40D6-BD6A-809B7C86A552}" dt="2026-07-11T02:02:15.763" v="23" actId="208"/>
+          <ac:picMkLst>
+            <pc:docMk/>
+            <pc:sldMk cId="2054621274" sldId="276"/>
+            <ac:picMk id="11" creationId="{A84FA3DF-9056-5DC7-9AC1-C9FB17A1CCDB}"/>
+          </ac:picMkLst>
+        </pc:picChg>
+        <pc:picChg chg="mod">
+          <ac:chgData name="민석 진" userId="d54531ed81a87222" providerId="LiveId" clId="{5E22E9DC-B28E-40D6-BD6A-809B7C86A552}" dt="2026-07-11T02:02:17.239" v="24" actId="208"/>
+          <ac:picMkLst>
+            <pc:docMk/>
+            <pc:sldMk cId="2054621274" sldId="276"/>
+            <ac:picMk id="15" creationId="{59A4F6A6-C982-FCEC-436B-B1C20BD842D9}"/>
+          </ac:picMkLst>
+        </pc:picChg>
+        <pc:picChg chg="mod">
+          <ac:chgData name="민석 진" userId="d54531ed81a87222" providerId="LiveId" clId="{5E22E9DC-B28E-40D6-BD6A-809B7C86A552}" dt="2026-07-11T02:02:18.856" v="25" actId="208"/>
+          <ac:picMkLst>
+            <pc:docMk/>
+            <pc:sldMk cId="2054621274" sldId="276"/>
+            <ac:picMk id="19" creationId="{DE70FE35-9C32-9200-5BDD-C61A281B54B0}"/>
+          </ac:picMkLst>
+        </pc:picChg>
+      </pc:sldChg>
+      <pc:sldChg chg="modSp mod">
+        <pc:chgData name="민석 진" userId="d54531ed81a87222" providerId="LiveId" clId="{5E22E9DC-B28E-40D6-BD6A-809B7C86A552}" dt="2026-07-11T02:02:25.335" v="27" actId="208"/>
+        <pc:sldMkLst>
+          <pc:docMk/>
+          <pc:sldMk cId="2661722240" sldId="277"/>
+        </pc:sldMkLst>
+        <pc:picChg chg="mod">
+          <ac:chgData name="민석 진" userId="d54531ed81a87222" providerId="LiveId" clId="{5E22E9DC-B28E-40D6-BD6A-809B7C86A552}" dt="2026-07-11T02:02:25.335" v="27" actId="208"/>
+          <ac:picMkLst>
+            <pc:docMk/>
+            <pc:sldMk cId="2661722240" sldId="277"/>
+            <ac:picMk id="3" creationId="{5D1FDDC6-0659-F182-5B59-2BDAE9E795D9}"/>
+          </ac:picMkLst>
+        </pc:picChg>
+        <pc:picChg chg="mod">
+          <ac:chgData name="민석 진" userId="d54531ed81a87222" providerId="LiveId" clId="{5E22E9DC-B28E-40D6-BD6A-809B7C86A552}" dt="2026-07-11T02:02:23.687" v="26" actId="208"/>
+          <ac:picMkLst>
+            <pc:docMk/>
+            <pc:sldMk cId="2661722240" sldId="277"/>
+            <ac:picMk id="5" creationId="{D58A8F04-FECC-D9A5-B9E6-CF98AF03C390}"/>
+          </ac:picMkLst>
+        </pc:picChg>
+      </pc:sldChg>
+      <pc:sldChg chg="modSp mod">
+        <pc:chgData name="민석 진" userId="d54531ed81a87222" providerId="LiveId" clId="{5E22E9DC-B28E-40D6-BD6A-809B7C86A552}" dt="2026-07-11T02:02:41.701" v="33" actId="208"/>
+        <pc:sldMkLst>
+          <pc:docMk/>
+          <pc:sldMk cId="3387466816" sldId="278"/>
+        </pc:sldMkLst>
+        <pc:picChg chg="mod">
+          <ac:chgData name="민석 진" userId="d54531ed81a87222" providerId="LiveId" clId="{5E22E9DC-B28E-40D6-BD6A-809B7C86A552}" dt="2026-07-11T02:02:36.774" v="31" actId="208"/>
+          <ac:picMkLst>
+            <pc:docMk/>
+            <pc:sldMk cId="3387466816" sldId="278"/>
+            <ac:picMk id="9" creationId="{43B0F971-6B28-4579-C3B2-167519697499}"/>
+          </ac:picMkLst>
+        </pc:picChg>
+        <pc:picChg chg="mod">
+          <ac:chgData name="민석 진" userId="d54531ed81a87222" providerId="LiveId" clId="{5E22E9DC-B28E-40D6-BD6A-809B7C86A552}" dt="2026-07-11T02:02:40.241" v="32" actId="208"/>
+          <ac:picMkLst>
+            <pc:docMk/>
+            <pc:sldMk cId="3387466816" sldId="278"/>
+            <ac:picMk id="11" creationId="{CC24D8CA-98F3-288F-4090-E00FAD956382}"/>
+          </ac:picMkLst>
+        </pc:picChg>
+        <pc:picChg chg="mod">
+          <ac:chgData name="민석 진" userId="d54531ed81a87222" providerId="LiveId" clId="{5E22E9DC-B28E-40D6-BD6A-809B7C86A552}" dt="2026-07-11T02:02:41.701" v="33" actId="208"/>
+          <ac:picMkLst>
+            <pc:docMk/>
+            <pc:sldMk cId="3387466816" sldId="278"/>
+            <ac:picMk id="14" creationId="{93571443-4711-A65F-1968-0F9E700C7C5F}"/>
+          </ac:picMkLst>
+        </pc:picChg>
+      </pc:sldChg>
+      <pc:sldChg chg="modSp mod">
+        <pc:chgData name="민석 진" userId="d54531ed81a87222" providerId="LiveId" clId="{5E22E9DC-B28E-40D6-BD6A-809B7C86A552}" dt="2026-07-11T02:02:50.631" v="36" actId="208"/>
+        <pc:sldMkLst>
+          <pc:docMk/>
+          <pc:sldMk cId="1127584739" sldId="279"/>
+        </pc:sldMkLst>
+        <pc:picChg chg="mod">
+          <ac:chgData name="민석 진" userId="d54531ed81a87222" providerId="LiveId" clId="{5E22E9DC-B28E-40D6-BD6A-809B7C86A552}" dt="2026-07-11T02:02:47.842" v="34" actId="208"/>
+          <ac:picMkLst>
+            <pc:docMk/>
+            <pc:sldMk cId="1127584739" sldId="279"/>
+            <ac:picMk id="15" creationId="{F0D2BCB3-EB16-BB18-0E38-F1B2DE427703}"/>
+          </ac:picMkLst>
+        </pc:picChg>
+        <pc:picChg chg="mod">
+          <ac:chgData name="민석 진" userId="d54531ed81a87222" providerId="LiveId" clId="{5E22E9DC-B28E-40D6-BD6A-809B7C86A552}" dt="2026-07-11T02:02:49.371" v="35" actId="208"/>
+          <ac:picMkLst>
+            <pc:docMk/>
+            <pc:sldMk cId="1127584739" sldId="279"/>
+            <ac:picMk id="17" creationId="{FEF86F5B-BE92-1F55-9552-20578B0C3F57}"/>
+          </ac:picMkLst>
+        </pc:picChg>
+        <pc:picChg chg="mod">
+          <ac:chgData name="민석 진" userId="d54531ed81a87222" providerId="LiveId" clId="{5E22E9DC-B28E-40D6-BD6A-809B7C86A552}" dt="2026-07-11T02:02:50.631" v="36" actId="208"/>
+          <ac:picMkLst>
+            <pc:docMk/>
+            <pc:sldMk cId="1127584739" sldId="279"/>
+            <ac:picMk id="19" creationId="{2386C9DA-F831-EEAE-553B-492718C336F3}"/>
+          </ac:picMkLst>
+        </pc:picChg>
+      </pc:sldChg>
+      <pc:sldChg chg="modSp mod">
+        <pc:chgData name="민석 진" userId="d54531ed81a87222" providerId="LiveId" clId="{5E22E9DC-B28E-40D6-BD6A-809B7C86A552}" dt="2026-07-11T02:03:11.718" v="44" actId="208"/>
+        <pc:sldMkLst>
+          <pc:docMk/>
+          <pc:sldMk cId="3231419190" sldId="280"/>
+        </pc:sldMkLst>
+        <pc:picChg chg="mod">
+          <ac:chgData name="민석 진" userId="d54531ed81a87222" providerId="LiveId" clId="{5E22E9DC-B28E-40D6-BD6A-809B7C86A552}" dt="2026-07-11T02:03:10.563" v="43" actId="208"/>
+          <ac:picMkLst>
+            <pc:docMk/>
+            <pc:sldMk cId="3231419190" sldId="280"/>
+            <ac:picMk id="3" creationId="{7B2A6484-1AD6-C048-A6E0-8D5CE5D99BAA}"/>
+          </ac:picMkLst>
+        </pc:picChg>
+        <pc:picChg chg="mod">
+          <ac:chgData name="민석 진" userId="d54531ed81a87222" providerId="LiveId" clId="{5E22E9DC-B28E-40D6-BD6A-809B7C86A552}" dt="2026-07-11T02:03:11.718" v="44" actId="208"/>
+          <ac:picMkLst>
+            <pc:docMk/>
+            <pc:sldMk cId="3231419190" sldId="280"/>
+            <ac:picMk id="9" creationId="{8CDD0488-C624-746B-1ECD-2A7E37A9C217}"/>
+          </ac:picMkLst>
+        </pc:picChg>
+        <pc:picChg chg="mod">
+          <ac:chgData name="민석 진" userId="d54531ed81a87222" providerId="LiveId" clId="{5E22E9DC-B28E-40D6-BD6A-809B7C86A552}" dt="2026-07-11T02:03:09.290" v="42" actId="208"/>
+          <ac:picMkLst>
+            <pc:docMk/>
+            <pc:sldMk cId="3231419190" sldId="280"/>
+            <ac:picMk id="10" creationId="{3BB3EAC3-748F-F114-90EA-DDB254DEBDE1}"/>
+          </ac:picMkLst>
+        </pc:picChg>
+      </pc:sldChg>
+      <pc:sldChg chg="modSp mod">
+        <pc:chgData name="민석 진" userId="d54531ed81a87222" providerId="LiveId" clId="{5E22E9DC-B28E-40D6-BD6A-809B7C86A552}" dt="2026-07-11T02:01:28.372" v="6" actId="208"/>
+        <pc:sldMkLst>
+          <pc:docMk/>
+          <pc:sldMk cId="1894612480" sldId="281"/>
+        </pc:sldMkLst>
+        <pc:picChg chg="mod">
+          <ac:chgData name="민석 진" userId="d54531ed81a87222" providerId="LiveId" clId="{5E22E9DC-B28E-40D6-BD6A-809B7C86A552}" dt="2026-07-11T02:01:25.117" v="5" actId="208"/>
+          <ac:picMkLst>
+            <pc:docMk/>
+            <pc:sldMk cId="1894612480" sldId="281"/>
+            <ac:picMk id="5" creationId="{FC154A7A-FF45-6D73-A4B4-1B7210EED63B}"/>
+          </ac:picMkLst>
+        </pc:picChg>
+        <pc:picChg chg="mod">
+          <ac:chgData name="민석 진" userId="d54531ed81a87222" providerId="LiveId" clId="{5E22E9DC-B28E-40D6-BD6A-809B7C86A552}" dt="2026-07-11T02:01:28.372" v="6" actId="208"/>
+          <ac:picMkLst>
+            <pc:docMk/>
+            <pc:sldMk cId="1894612480" sldId="281"/>
+            <ac:picMk id="12" creationId="{A38EEA9B-4254-702B-94D0-CF319DE711D9}"/>
+          </ac:picMkLst>
+        </pc:picChg>
+      </pc:sldChg>
+      <pc:sldChg chg="modSp mod">
+        <pc:chgData name="민석 진" userId="d54531ed81a87222" providerId="LiveId" clId="{5E22E9DC-B28E-40D6-BD6A-809B7C86A552}" dt="2026-07-11T02:01:37.377" v="9" actId="208"/>
+        <pc:sldMkLst>
+          <pc:docMk/>
+          <pc:sldMk cId="536101761" sldId="282"/>
+        </pc:sldMkLst>
+        <pc:picChg chg="mod">
+          <ac:chgData name="민석 진" userId="d54531ed81a87222" providerId="LiveId" clId="{5E22E9DC-B28E-40D6-BD6A-809B7C86A552}" dt="2026-07-11T02:01:37.377" v="9" actId="208"/>
+          <ac:picMkLst>
+            <pc:docMk/>
+            <pc:sldMk cId="536101761" sldId="282"/>
+            <ac:picMk id="4" creationId="{2F7670C2-1061-A362-C380-91A6F4797018}"/>
+          </ac:picMkLst>
+        </pc:picChg>
+        <pc:picChg chg="mod">
+          <ac:chgData name="민석 진" userId="d54531ed81a87222" providerId="LiveId" clId="{5E22E9DC-B28E-40D6-BD6A-809B7C86A552}" dt="2026-07-11T02:01:35.446" v="8" actId="208"/>
+          <ac:picMkLst>
+            <pc:docMk/>
+            <pc:sldMk cId="536101761" sldId="282"/>
+            <ac:picMk id="6" creationId="{168781E0-2B09-F56F-DFFB-2F56AB916660}"/>
+          </ac:picMkLst>
+        </pc:picChg>
+        <pc:picChg chg="mod">
+          <ac:chgData name="민석 진" userId="d54531ed81a87222" providerId="LiveId" clId="{5E22E9DC-B28E-40D6-BD6A-809B7C86A552}" dt="2026-07-11T02:01:33.714" v="7" actId="208"/>
+          <ac:picMkLst>
+            <pc:docMk/>
+            <pc:sldMk cId="536101761" sldId="282"/>
+            <ac:picMk id="14" creationId="{B52CB801-F30C-5ABF-6EE0-F1183F8EC0D6}"/>
+          </ac:picMkLst>
+        </pc:picChg>
+      </pc:sldChg>
+      <pc:sldChg chg="modSp mod">
+        <pc:chgData name="민석 진" userId="d54531ed81a87222" providerId="LiveId" clId="{5E22E9DC-B28E-40D6-BD6A-809B7C86A552}" dt="2026-07-11T02:01:47.031" v="13" actId="208"/>
+        <pc:sldMkLst>
+          <pc:docMk/>
+          <pc:sldMk cId="1195130978" sldId="283"/>
+        </pc:sldMkLst>
+        <pc:picChg chg="mod">
+          <ac:chgData name="민석 진" userId="d54531ed81a87222" providerId="LiveId" clId="{5E22E9DC-B28E-40D6-BD6A-809B7C86A552}" dt="2026-07-11T02:01:44.575" v="12" actId="208"/>
+          <ac:picMkLst>
+            <pc:docMk/>
+            <pc:sldMk cId="1195130978" sldId="283"/>
+            <ac:picMk id="5" creationId="{7A90B4ED-4DDF-0332-3A99-2DA9EA79D6C4}"/>
+          </ac:picMkLst>
+        </pc:picChg>
+        <pc:picChg chg="mod">
+          <ac:chgData name="민석 진" userId="d54531ed81a87222" providerId="LiveId" clId="{5E22E9DC-B28E-40D6-BD6A-809B7C86A552}" dt="2026-07-11T02:01:42.996" v="11" actId="208"/>
+          <ac:picMkLst>
+            <pc:docMk/>
+            <pc:sldMk cId="1195130978" sldId="283"/>
+            <ac:picMk id="7" creationId="{DF0AABF8-97B6-BEC4-90C3-0AC883680A73}"/>
+          </ac:picMkLst>
+        </pc:picChg>
+        <pc:picChg chg="mod">
+          <ac:chgData name="민석 진" userId="d54531ed81a87222" providerId="LiveId" clId="{5E22E9DC-B28E-40D6-BD6A-809B7C86A552}" dt="2026-07-11T02:01:47.031" v="13" actId="208"/>
+          <ac:picMkLst>
+            <pc:docMk/>
+            <pc:sldMk cId="1195130978" sldId="283"/>
+            <ac:picMk id="14" creationId="{EDB79A0A-8B6F-6A09-EED1-973D8847C56C}"/>
+          </ac:picMkLst>
+        </pc:picChg>
+      </pc:sldChg>
+      <pc:sldChg chg="modSp mod">
+        <pc:chgData name="민석 진" userId="d54531ed81a87222" providerId="LiveId" clId="{5E22E9DC-B28E-40D6-BD6A-809B7C86A552}" dt="2026-07-11T02:01:55.958" v="16" actId="208"/>
+        <pc:sldMkLst>
+          <pc:docMk/>
+          <pc:sldMk cId="2652195612" sldId="284"/>
+        </pc:sldMkLst>
+        <pc:picChg chg="mod">
+          <ac:chgData name="민석 진" userId="d54531ed81a87222" providerId="LiveId" clId="{5E22E9DC-B28E-40D6-BD6A-809B7C86A552}" dt="2026-07-11T02:01:51.954" v="14" actId="208"/>
+          <ac:picMkLst>
+            <pc:docMk/>
+            <pc:sldMk cId="2652195612" sldId="284"/>
+            <ac:picMk id="3" creationId="{01B9E39E-9CBD-36B1-9011-72D783205ED9}"/>
+          </ac:picMkLst>
+        </pc:picChg>
+        <pc:picChg chg="mod">
+          <ac:chgData name="민석 진" userId="d54531ed81a87222" providerId="LiveId" clId="{5E22E9DC-B28E-40D6-BD6A-809B7C86A552}" dt="2026-07-11T02:01:53.558" v="15" actId="208"/>
+          <ac:picMkLst>
+            <pc:docMk/>
+            <pc:sldMk cId="2652195612" sldId="284"/>
+            <ac:picMk id="6" creationId="{3B8C482D-6177-3C8B-BA19-9B3E710B8D1D}"/>
+          </ac:picMkLst>
+        </pc:picChg>
+        <pc:picChg chg="mod">
+          <ac:chgData name="민석 진" userId="d54531ed81a87222" providerId="LiveId" clId="{5E22E9DC-B28E-40D6-BD6A-809B7C86A552}" dt="2026-07-11T02:01:55.958" v="16" actId="208"/>
+          <ac:picMkLst>
+            <pc:docMk/>
+            <pc:sldMk cId="2652195612" sldId="284"/>
+            <ac:picMk id="13" creationId="{ADA8D15C-8136-E5B9-380B-8E9C23446D81}"/>
+          </ac:picMkLst>
+        </pc:picChg>
+      </pc:sldChg>
+      <pc:sldChg chg="modSp mod">
+        <pc:chgData name="민석 진" userId="d54531ed81a87222" providerId="LiveId" clId="{5E22E9DC-B28E-40D6-BD6A-809B7C86A552}" dt="2026-07-11T02:02:02.119" v="18" actId="208"/>
+        <pc:sldMkLst>
+          <pc:docMk/>
+          <pc:sldMk cId="1467856085" sldId="285"/>
+        </pc:sldMkLst>
+        <pc:picChg chg="mod">
+          <ac:chgData name="민석 진" userId="d54531ed81a87222" providerId="LiveId" clId="{5E22E9DC-B28E-40D6-BD6A-809B7C86A552}" dt="2026-07-11T02:02:00.564" v="17" actId="208"/>
+          <ac:picMkLst>
+            <pc:docMk/>
+            <pc:sldMk cId="1467856085" sldId="285"/>
+            <ac:picMk id="4" creationId="{63970AD5-07E6-8C77-EA25-3153831A5FBD}"/>
+          </ac:picMkLst>
+        </pc:picChg>
+        <pc:picChg chg="mod">
+          <ac:chgData name="민석 진" userId="d54531ed81a87222" providerId="LiveId" clId="{5E22E9DC-B28E-40D6-BD6A-809B7C86A552}" dt="2026-07-11T02:02:02.119" v="18" actId="208"/>
+          <ac:picMkLst>
+            <pc:docMk/>
+            <pc:sldMk cId="1467856085" sldId="285"/>
+            <ac:picMk id="5" creationId="{2A7E63B8-90E5-4326-48DD-3D7341B3FD7B}"/>
+          </ac:picMkLst>
+        </pc:picChg>
+      </pc:sldChg>
+      <pc:sldChg chg="modSp mod">
+        <pc:chgData name="민석 진" userId="d54531ed81a87222" providerId="LiveId" clId="{5E22E9DC-B28E-40D6-BD6A-809B7C86A552}" dt="2026-07-11T02:02:11.011" v="21" actId="208"/>
+        <pc:sldMkLst>
+          <pc:docMk/>
+          <pc:sldMk cId="2363373357" sldId="286"/>
+        </pc:sldMkLst>
+        <pc:picChg chg="mod">
+          <ac:chgData name="민석 진" userId="d54531ed81a87222" providerId="LiveId" clId="{5E22E9DC-B28E-40D6-BD6A-809B7C86A552}" dt="2026-07-11T02:02:06.829" v="19" actId="208"/>
+          <ac:picMkLst>
+            <pc:docMk/>
+            <pc:sldMk cId="2363373357" sldId="286"/>
+            <ac:picMk id="4" creationId="{7A4C88DA-E334-C83A-4FAE-788A925F5C42}"/>
+          </ac:picMkLst>
+        </pc:picChg>
+        <pc:picChg chg="mod">
+          <ac:chgData name="민석 진" userId="d54531ed81a87222" providerId="LiveId" clId="{5E22E9DC-B28E-40D6-BD6A-809B7C86A552}" dt="2026-07-11T02:02:08.721" v="20" actId="208"/>
+          <ac:picMkLst>
+            <pc:docMk/>
+            <pc:sldMk cId="2363373357" sldId="286"/>
+            <ac:picMk id="6" creationId="{EF283113-E64C-D638-4BA3-E76D7038E458}"/>
+          </ac:picMkLst>
+        </pc:picChg>
+        <pc:picChg chg="mod">
+          <ac:chgData name="민석 진" userId="d54531ed81a87222" providerId="LiveId" clId="{5E22E9DC-B28E-40D6-BD6A-809B7C86A552}" dt="2026-07-11T02:02:11.011" v="21" actId="208"/>
+          <ac:picMkLst>
+            <pc:docMk/>
+            <pc:sldMk cId="2363373357" sldId="286"/>
+            <ac:picMk id="12" creationId="{38E50A75-8F70-BAF2-5A19-8AC9EF31C27A}"/>
+          </ac:picMkLst>
+        </pc:picChg>
+      </pc:sldChg>
+      <pc:sldChg chg="modSp mod">
+        <pc:chgData name="민석 진" userId="d54531ed81a87222" providerId="LiveId" clId="{5E22E9DC-B28E-40D6-BD6A-809B7C86A552}" dt="2026-07-11T02:02:32.529" v="30" actId="208"/>
+        <pc:sldMkLst>
+          <pc:docMk/>
+          <pc:sldMk cId="313844204" sldId="287"/>
+        </pc:sldMkLst>
+        <pc:picChg chg="mod">
+          <ac:chgData name="민석 진" userId="d54531ed81a87222" providerId="LiveId" clId="{5E22E9DC-B28E-40D6-BD6A-809B7C86A552}" dt="2026-07-11T02:02:30.822" v="29" actId="208"/>
+          <ac:picMkLst>
+            <pc:docMk/>
+            <pc:sldMk cId="313844204" sldId="287"/>
+            <ac:picMk id="3" creationId="{2BE490A8-A7F5-3D2E-9588-7F5BDCD0F1E7}"/>
+          </ac:picMkLst>
+        </pc:picChg>
+        <pc:picChg chg="mod">
+          <ac:chgData name="민석 진" userId="d54531ed81a87222" providerId="LiveId" clId="{5E22E9DC-B28E-40D6-BD6A-809B7C86A552}" dt="2026-07-11T02:02:29.207" v="28" actId="208"/>
+          <ac:picMkLst>
+            <pc:docMk/>
+            <pc:sldMk cId="313844204" sldId="287"/>
+            <ac:picMk id="5" creationId="{D58A8F04-FECC-D9A5-B9E6-CF98AF03C390}"/>
+          </ac:picMkLst>
+        </pc:picChg>
+        <pc:picChg chg="mod">
+          <ac:chgData name="민석 진" userId="d54531ed81a87222" providerId="LiveId" clId="{5E22E9DC-B28E-40D6-BD6A-809B7C86A552}" dt="2026-07-11T02:02:32.529" v="30" actId="208"/>
+          <ac:picMkLst>
+            <pc:docMk/>
+            <pc:sldMk cId="313844204" sldId="287"/>
+            <ac:picMk id="10" creationId="{C797CF6C-3B8D-2CCB-3C4E-A46F346ABEAE}"/>
+          </ac:picMkLst>
+        </pc:picChg>
+      </pc:sldChg>
+      <pc:sldChg chg="modSp mod">
+        <pc:chgData name="민석 진" userId="d54531ed81a87222" providerId="LiveId" clId="{5E22E9DC-B28E-40D6-BD6A-809B7C86A552}" dt="2026-07-11T02:02:59.725" v="39" actId="208"/>
+        <pc:sldMkLst>
+          <pc:docMk/>
+          <pc:sldMk cId="2838190249" sldId="288"/>
+        </pc:sldMkLst>
+        <pc:picChg chg="mod">
+          <ac:chgData name="민석 진" userId="d54531ed81a87222" providerId="LiveId" clId="{5E22E9DC-B28E-40D6-BD6A-809B7C86A552}" dt="2026-07-11T02:02:56.200" v="37" actId="208"/>
+          <ac:picMkLst>
+            <pc:docMk/>
+            <pc:sldMk cId="2838190249" sldId="288"/>
+            <ac:picMk id="11" creationId="{782E9F59-9EA6-698F-1DBE-F19F20A16F39}"/>
+          </ac:picMkLst>
+        </pc:picChg>
+        <pc:picChg chg="mod">
+          <ac:chgData name="민석 진" userId="d54531ed81a87222" providerId="LiveId" clId="{5E22E9DC-B28E-40D6-BD6A-809B7C86A552}" dt="2026-07-11T02:02:58.406" v="38" actId="208"/>
+          <ac:picMkLst>
+            <pc:docMk/>
+            <pc:sldMk cId="2838190249" sldId="288"/>
+            <ac:picMk id="13" creationId="{4F03F4D2-B38A-CE12-F445-CC9F9FC2C433}"/>
+          </ac:picMkLst>
+        </pc:picChg>
+        <pc:picChg chg="mod">
+          <ac:chgData name="민석 진" userId="d54531ed81a87222" providerId="LiveId" clId="{5E22E9DC-B28E-40D6-BD6A-809B7C86A552}" dt="2026-07-11T02:02:59.725" v="39" actId="208"/>
+          <ac:picMkLst>
+            <pc:docMk/>
+            <pc:sldMk cId="2838190249" sldId="288"/>
+            <ac:picMk id="16" creationId="{1815720C-D07B-5250-26A5-146C7A2AF963}"/>
+          </ac:picMkLst>
+        </pc:picChg>
+      </pc:sldChg>
+      <pc:sldChg chg="modSp mod">
+        <pc:chgData name="민석 진" userId="d54531ed81a87222" providerId="LiveId" clId="{5E22E9DC-B28E-40D6-BD6A-809B7C86A552}" dt="2026-07-11T02:03:05.315" v="41" actId="208"/>
+        <pc:sldMkLst>
+          <pc:docMk/>
+          <pc:sldMk cId="2450197478" sldId="289"/>
+        </pc:sldMkLst>
+        <pc:picChg chg="mod">
+          <ac:chgData name="민석 진" userId="d54531ed81a87222" providerId="LiveId" clId="{5E22E9DC-B28E-40D6-BD6A-809B7C86A552}" dt="2026-07-11T02:03:03.908" v="40" actId="208"/>
+          <ac:picMkLst>
+            <pc:docMk/>
+            <pc:sldMk cId="2450197478" sldId="289"/>
+            <ac:picMk id="8" creationId="{5CF7C760-5EF5-C1C7-F539-DA70025B9134}"/>
+          </ac:picMkLst>
+        </pc:picChg>
+        <pc:picChg chg="mod">
+          <ac:chgData name="민석 진" userId="d54531ed81a87222" providerId="LiveId" clId="{5E22E9DC-B28E-40D6-BD6A-809B7C86A552}" dt="2026-07-11T02:03:05.315" v="41" actId="208"/>
+          <ac:picMkLst>
+            <pc:docMk/>
+            <pc:sldMk cId="2450197478" sldId="289"/>
+            <ac:picMk id="11" creationId="{5C59D827-AEDF-8A93-E048-E627C4DF0887}"/>
+          </ac:picMkLst>
+        </pc:picChg>
+      </pc:sldChg>
+    </pc:docChg>
+  </pc:docChgLst>
+</pc:chgInfo>
 </file>
 
 <file path=ppt/charts/chart1.xml><?xml version="1.0" encoding="utf-8"?>
@@ -941,7 +1411,7 @@
           <a:p>
             <a:fld id="{B441A2CC-AD33-4BEB-BEDF-7117FCB0AF3A}" type="datetimeFigureOut">
               <a:rPr lang="ko-KR" altLang="en-US" smtClean="0"/>
-              <a:t>2023-06-25</a:t>
+              <a:t>2026-07-11</a:t>
             </a:fld>
             <a:endParaRPr lang="ko-KR" altLang="en-US"/>
           </a:p>
@@ -1139,7 +1609,7 @@
           <a:p>
             <a:fld id="{B441A2CC-AD33-4BEB-BEDF-7117FCB0AF3A}" type="datetimeFigureOut">
               <a:rPr lang="ko-KR" altLang="en-US" smtClean="0"/>
-              <a:t>2023-06-25</a:t>
+              <a:t>2026-07-11</a:t>
             </a:fld>
             <a:endParaRPr lang="ko-KR" altLang="en-US"/>
           </a:p>
@@ -1347,7 +1817,7 @@
           <a:p>
             <a:fld id="{B441A2CC-AD33-4BEB-BEDF-7117FCB0AF3A}" type="datetimeFigureOut">
               <a:rPr lang="ko-KR" altLang="en-US" smtClean="0"/>
-              <a:t>2023-06-25</a:t>
+              <a:t>2026-07-11</a:t>
             </a:fld>
             <a:endParaRPr lang="ko-KR" altLang="en-US"/>
           </a:p>
@@ -1545,7 +2015,7 @@
           <a:p>
             <a:fld id="{B441A2CC-AD33-4BEB-BEDF-7117FCB0AF3A}" type="datetimeFigureOut">
               <a:rPr lang="ko-KR" altLang="en-US" smtClean="0"/>
-              <a:t>2023-06-25</a:t>
+              <a:t>2026-07-11</a:t>
             </a:fld>
             <a:endParaRPr lang="ko-KR" altLang="en-US"/>
           </a:p>
@@ -1820,7 +2290,7 @@
           <a:p>
             <a:fld id="{B441A2CC-AD33-4BEB-BEDF-7117FCB0AF3A}" type="datetimeFigureOut">
               <a:rPr lang="ko-KR" altLang="en-US" smtClean="0"/>
-              <a:t>2023-06-25</a:t>
+              <a:t>2026-07-11</a:t>
             </a:fld>
             <a:endParaRPr lang="ko-KR" altLang="en-US"/>
           </a:p>
@@ -2085,7 +2555,7 @@
           <a:p>
             <a:fld id="{B441A2CC-AD33-4BEB-BEDF-7117FCB0AF3A}" type="datetimeFigureOut">
               <a:rPr lang="ko-KR" altLang="en-US" smtClean="0"/>
-              <a:t>2023-06-25</a:t>
+              <a:t>2026-07-11</a:t>
             </a:fld>
             <a:endParaRPr lang="ko-KR" altLang="en-US"/>
           </a:p>
@@ -2497,7 +2967,7 @@
           <a:p>
             <a:fld id="{B441A2CC-AD33-4BEB-BEDF-7117FCB0AF3A}" type="datetimeFigureOut">
               <a:rPr lang="ko-KR" altLang="en-US" smtClean="0"/>
-              <a:t>2023-06-25</a:t>
+              <a:t>2026-07-11</a:t>
             </a:fld>
             <a:endParaRPr lang="ko-KR" altLang="en-US"/>
           </a:p>
@@ -2638,7 +3108,7 @@
           <a:p>
             <a:fld id="{B441A2CC-AD33-4BEB-BEDF-7117FCB0AF3A}" type="datetimeFigureOut">
               <a:rPr lang="ko-KR" altLang="en-US" smtClean="0"/>
-              <a:t>2023-06-25</a:t>
+              <a:t>2026-07-11</a:t>
             </a:fld>
             <a:endParaRPr lang="ko-KR" altLang="en-US"/>
           </a:p>
@@ -2751,7 +3221,7 @@
           <a:p>
             <a:fld id="{B441A2CC-AD33-4BEB-BEDF-7117FCB0AF3A}" type="datetimeFigureOut">
               <a:rPr lang="ko-KR" altLang="en-US" smtClean="0"/>
-              <a:t>2023-06-25</a:t>
+              <a:t>2026-07-11</a:t>
             </a:fld>
             <a:endParaRPr lang="ko-KR" altLang="en-US"/>
           </a:p>
@@ -3062,7 +3532,7 @@
           <a:p>
             <a:fld id="{B441A2CC-AD33-4BEB-BEDF-7117FCB0AF3A}" type="datetimeFigureOut">
               <a:rPr lang="ko-KR" altLang="en-US" smtClean="0"/>
-              <a:t>2023-06-25</a:t>
+              <a:t>2026-07-11</a:t>
             </a:fld>
             <a:endParaRPr lang="ko-KR" altLang="en-US"/>
           </a:p>
@@ -3350,7 +3820,7 @@
           <a:p>
             <a:fld id="{B441A2CC-AD33-4BEB-BEDF-7117FCB0AF3A}" type="datetimeFigureOut">
               <a:rPr lang="ko-KR" altLang="en-US" smtClean="0"/>
-              <a:t>2023-06-25</a:t>
+              <a:t>2026-07-11</a:t>
             </a:fld>
             <a:endParaRPr lang="ko-KR" altLang="en-US"/>
           </a:p>
@@ -3597,7 +4067,7 @@
           <a:p>
             <a:fld id="{B441A2CC-AD33-4BEB-BEDF-7117FCB0AF3A}" type="datetimeFigureOut">
               <a:rPr lang="ko-KR" altLang="en-US" smtClean="0"/>
-              <a:t>2023-06-25</a:t>
+              <a:t>2026-07-11</a:t>
             </a:fld>
             <a:endParaRPr lang="ko-KR" altLang="en-US"/>
           </a:p>
@@ -4401,6 +4871,11 @@
           <a:prstGeom prst="rect">
             <a:avLst/>
           </a:prstGeom>
+          <a:ln>
+            <a:solidFill>
+              <a:schemeClr val="tx1"/>
+            </a:solidFill>
+          </a:ln>
         </p:spPr>
       </p:pic>
       <p:sp>
@@ -4682,6 +5157,11 @@
           <a:prstGeom prst="rect">
             <a:avLst/>
           </a:prstGeom>
+          <a:ln>
+            <a:solidFill>
+              <a:schemeClr val="tx1"/>
+            </a:solidFill>
+          </a:ln>
         </p:spPr>
       </p:pic>
       <p:pic>
@@ -4712,6 +5192,11 @@
           <a:prstGeom prst="rect">
             <a:avLst/>
           </a:prstGeom>
+          <a:ln>
+            <a:solidFill>
+              <a:schemeClr val="tx1"/>
+            </a:solidFill>
+          </a:ln>
         </p:spPr>
       </p:pic>
       <p:sp>
@@ -5119,6 +5604,11 @@
           <a:prstGeom prst="rect">
             <a:avLst/>
           </a:prstGeom>
+          <a:ln>
+            <a:solidFill>
+              <a:schemeClr val="tx1"/>
+            </a:solidFill>
+          </a:ln>
         </p:spPr>
       </p:pic>
       <p:pic>
@@ -5149,6 +5639,11 @@
           <a:prstGeom prst="rect">
             <a:avLst/>
           </a:prstGeom>
+          <a:ln>
+            <a:solidFill>
+              <a:schemeClr val="tx1"/>
+            </a:solidFill>
+          </a:ln>
         </p:spPr>
       </p:pic>
       <p:sp>
@@ -5534,6 +6029,11 @@
           <a:prstGeom prst="rect">
             <a:avLst/>
           </a:prstGeom>
+          <a:ln>
+            <a:solidFill>
+              <a:schemeClr val="tx1"/>
+            </a:solidFill>
+          </a:ln>
         </p:spPr>
       </p:pic>
       <p:pic>
@@ -5564,6 +6064,11 @@
           <a:prstGeom prst="rect">
             <a:avLst/>
           </a:prstGeom>
+          <a:ln>
+            <a:solidFill>
+              <a:schemeClr val="tx1"/>
+            </a:solidFill>
+          </a:ln>
         </p:spPr>
       </p:pic>
       <p:pic>
@@ -5594,6 +6099,11 @@
           <a:prstGeom prst="rect">
             <a:avLst/>
           </a:prstGeom>
+          <a:ln>
+            <a:solidFill>
+              <a:schemeClr val="tx1"/>
+            </a:solidFill>
+          </a:ln>
         </p:spPr>
       </p:pic>
     </p:spTree>
@@ -5949,6 +6459,11 @@
           <a:prstGeom prst="rect">
             <a:avLst/>
           </a:prstGeom>
+          <a:ln>
+            <a:solidFill>
+              <a:schemeClr val="tx1"/>
+            </a:solidFill>
+          </a:ln>
         </p:spPr>
       </p:pic>
       <p:pic>
@@ -5979,6 +6494,11 @@
           <a:prstGeom prst="rect">
             <a:avLst/>
           </a:prstGeom>
+          <a:ln>
+            <a:solidFill>
+              <a:schemeClr val="tx1"/>
+            </a:solidFill>
+          </a:ln>
         </p:spPr>
       </p:pic>
       <p:pic>
@@ -6009,6 +6529,11 @@
           <a:prstGeom prst="rect">
             <a:avLst/>
           </a:prstGeom>
+          <a:ln>
+            <a:solidFill>
+              <a:schemeClr val="tx1"/>
+            </a:solidFill>
+          </a:ln>
         </p:spPr>
       </p:pic>
     </p:spTree>
@@ -6364,6 +6889,11 @@
           <a:prstGeom prst="rect">
             <a:avLst/>
           </a:prstGeom>
+          <a:ln>
+            <a:solidFill>
+              <a:schemeClr val="tx1"/>
+            </a:solidFill>
+          </a:ln>
         </p:spPr>
       </p:pic>
       <p:pic>
@@ -6394,6 +6924,11 @@
           <a:prstGeom prst="rect">
             <a:avLst/>
           </a:prstGeom>
+          <a:ln>
+            <a:solidFill>
+              <a:schemeClr val="tx1"/>
+            </a:solidFill>
+          </a:ln>
         </p:spPr>
       </p:pic>
       <p:pic>
@@ -6424,6 +6959,11 @@
           <a:prstGeom prst="rect">
             <a:avLst/>
           </a:prstGeom>
+          <a:ln>
+            <a:solidFill>
+              <a:schemeClr val="tx1"/>
+            </a:solidFill>
+          </a:ln>
         </p:spPr>
       </p:pic>
     </p:spTree>
@@ -6779,6 +7319,11 @@
           <a:prstGeom prst="rect">
             <a:avLst/>
           </a:prstGeom>
+          <a:ln>
+            <a:solidFill>
+              <a:schemeClr val="tx1"/>
+            </a:solidFill>
+          </a:ln>
         </p:spPr>
       </p:pic>
       <p:pic>
@@ -6809,6 +7354,11 @@
           <a:prstGeom prst="rect">
             <a:avLst/>
           </a:prstGeom>
+          <a:ln>
+            <a:solidFill>
+              <a:schemeClr val="tx1"/>
+            </a:solidFill>
+          </a:ln>
         </p:spPr>
       </p:pic>
     </p:spTree>
@@ -7142,6 +7692,11 @@
           <a:prstGeom prst="rect">
             <a:avLst/>
           </a:prstGeom>
+          <a:ln>
+            <a:solidFill>
+              <a:schemeClr val="tx1"/>
+            </a:solidFill>
+          </a:ln>
         </p:spPr>
       </p:pic>
       <p:pic>
@@ -7172,6 +7727,11 @@
           <a:prstGeom prst="rect">
             <a:avLst/>
           </a:prstGeom>
+          <a:ln>
+            <a:solidFill>
+              <a:schemeClr val="tx1"/>
+            </a:solidFill>
+          </a:ln>
         </p:spPr>
       </p:pic>
       <p:pic>
@@ -7202,6 +7762,11 @@
           <a:prstGeom prst="rect">
             <a:avLst/>
           </a:prstGeom>
+          <a:ln>
+            <a:solidFill>
+              <a:schemeClr val="tx1"/>
+            </a:solidFill>
+          </a:ln>
         </p:spPr>
       </p:pic>
     </p:spTree>
@@ -7513,6 +8078,11 @@
           <a:prstGeom prst="rect">
             <a:avLst/>
           </a:prstGeom>
+          <a:ln>
+            <a:solidFill>
+              <a:schemeClr val="tx1"/>
+            </a:solidFill>
+          </a:ln>
         </p:spPr>
       </p:pic>
       <p:pic>
@@ -7543,6 +8113,11 @@
           <a:prstGeom prst="rect">
             <a:avLst/>
           </a:prstGeom>
+          <a:ln>
+            <a:solidFill>
+              <a:schemeClr val="tx1"/>
+            </a:solidFill>
+          </a:ln>
         </p:spPr>
       </p:pic>
       <p:pic>
@@ -7573,6 +8148,11 @@
           <a:prstGeom prst="rect">
             <a:avLst/>
           </a:prstGeom>
+          <a:ln>
+            <a:solidFill>
+              <a:schemeClr val="tx1"/>
+            </a:solidFill>
+          </a:ln>
         </p:spPr>
       </p:pic>
     </p:spTree>
@@ -7633,6 +8213,11 @@
           <a:prstGeom prst="rect">
             <a:avLst/>
           </a:prstGeom>
+          <a:ln>
+            <a:solidFill>
+              <a:schemeClr val="tx1"/>
+            </a:solidFill>
+          </a:ln>
         </p:spPr>
       </p:pic>
       <p:sp>
@@ -7936,6 +8521,11 @@
           <a:prstGeom prst="rect">
             <a:avLst/>
           </a:prstGeom>
+          <a:ln>
+            <a:solidFill>
+              <a:schemeClr val="tx1"/>
+            </a:solidFill>
+          </a:ln>
         </p:spPr>
       </p:pic>
     </p:spTree>
@@ -7996,6 +8586,11 @@
           <a:prstGeom prst="rect">
             <a:avLst/>
           </a:prstGeom>
+          <a:ln>
+            <a:solidFill>
+              <a:schemeClr val="tx1"/>
+            </a:solidFill>
+          </a:ln>
         </p:spPr>
       </p:pic>
       <p:sp>
@@ -8321,6 +8916,11 @@
           <a:prstGeom prst="rect">
             <a:avLst/>
           </a:prstGeom>
+          <a:ln>
+            <a:solidFill>
+              <a:schemeClr val="tx1"/>
+            </a:solidFill>
+          </a:ln>
         </p:spPr>
       </p:pic>
       <p:pic>
@@ -8351,6 +8951,11 @@
           <a:prstGeom prst="rect">
             <a:avLst/>
           </a:prstGeom>
+          <a:ln>
+            <a:solidFill>
+              <a:schemeClr val="tx1"/>
+            </a:solidFill>
+          </a:ln>
         </p:spPr>
       </p:pic>
     </p:spTree>
@@ -10032,6 +10637,11 @@
           <a:prstGeom prst="rect">
             <a:avLst/>
           </a:prstGeom>
+          <a:ln>
+            <a:solidFill>
+              <a:schemeClr val="tx1"/>
+            </a:solidFill>
+          </a:ln>
         </p:spPr>
       </p:pic>
       <p:pic>
@@ -10062,6 +10672,11 @@
           <a:prstGeom prst="rect">
             <a:avLst/>
           </a:prstGeom>
+          <a:ln>
+            <a:solidFill>
+              <a:schemeClr val="tx1"/>
+            </a:solidFill>
+          </a:ln>
         </p:spPr>
       </p:pic>
       <p:sp>
@@ -10144,6 +10759,11 @@
           <a:prstGeom prst="rect">
             <a:avLst/>
           </a:prstGeom>
+          <a:ln>
+            <a:solidFill>
+              <a:schemeClr val="tx1"/>
+            </a:solidFill>
+          </a:ln>
         </p:spPr>
       </p:pic>
     </p:spTree>
@@ -10477,6 +11097,11 @@
           <a:prstGeom prst="rect">
             <a:avLst/>
           </a:prstGeom>
+          <a:ln>
+            <a:solidFill>
+              <a:schemeClr val="tx1"/>
+            </a:solidFill>
+          </a:ln>
         </p:spPr>
       </p:pic>
       <p:pic>
@@ -10507,6 +11132,11 @@
           <a:prstGeom prst="rect">
             <a:avLst/>
           </a:prstGeom>
+          <a:ln>
+            <a:solidFill>
+              <a:schemeClr val="tx1"/>
+            </a:solidFill>
+          </a:ln>
         </p:spPr>
       </p:pic>
       <p:pic>
@@ -10537,6 +11167,11 @@
           <a:prstGeom prst="rect">
             <a:avLst/>
           </a:prstGeom>
+          <a:ln>
+            <a:solidFill>
+              <a:schemeClr val="tx1"/>
+            </a:solidFill>
+          </a:ln>
         </p:spPr>
       </p:pic>
       <p:sp>
@@ -10922,6 +11557,11 @@
           <a:prstGeom prst="rect">
             <a:avLst/>
           </a:prstGeom>
+          <a:ln>
+            <a:solidFill>
+              <a:schemeClr val="tx1"/>
+            </a:solidFill>
+          </a:ln>
         </p:spPr>
       </p:pic>
       <p:pic>
@@ -10952,6 +11592,11 @@
           <a:prstGeom prst="rect">
             <a:avLst/>
           </a:prstGeom>
+          <a:ln>
+            <a:solidFill>
+              <a:schemeClr val="tx1"/>
+            </a:solidFill>
+          </a:ln>
         </p:spPr>
       </p:pic>
       <p:sp>
@@ -11034,6 +11679,11 @@
           <a:prstGeom prst="rect">
             <a:avLst/>
           </a:prstGeom>
+          <a:ln>
+            <a:solidFill>
+              <a:schemeClr val="tx1"/>
+            </a:solidFill>
+          </a:ln>
         </p:spPr>
       </p:pic>
     </p:spTree>
@@ -11367,6 +12017,11 @@
           <a:prstGeom prst="rect">
             <a:avLst/>
           </a:prstGeom>
+          <a:ln>
+            <a:solidFill>
+              <a:schemeClr val="tx1"/>
+            </a:solidFill>
+          </a:ln>
         </p:spPr>
       </p:pic>
       <p:sp>
@@ -11449,6 +12104,11 @@
           <a:prstGeom prst="rect">
             <a:avLst/>
           </a:prstGeom>
+          <a:ln>
+            <a:solidFill>
+              <a:schemeClr val="tx1"/>
+            </a:solidFill>
+          </a:ln>
         </p:spPr>
       </p:pic>
     </p:spTree>
@@ -11782,6 +12442,11 @@
           <a:prstGeom prst="rect">
             <a:avLst/>
           </a:prstGeom>
+          <a:ln>
+            <a:solidFill>
+              <a:schemeClr val="tx1"/>
+            </a:solidFill>
+          </a:ln>
         </p:spPr>
       </p:pic>
       <p:pic>
@@ -11812,6 +12477,11 @@
           <a:prstGeom prst="rect">
             <a:avLst/>
           </a:prstGeom>
+          <a:ln>
+            <a:solidFill>
+              <a:schemeClr val="tx1"/>
+            </a:solidFill>
+          </a:ln>
         </p:spPr>
       </p:pic>
       <p:pic>
@@ -11842,6 +12512,11 @@
           <a:prstGeom prst="rect">
             <a:avLst/>
           </a:prstGeom>
+          <a:ln>
+            <a:solidFill>
+              <a:schemeClr val="tx1"/>
+            </a:solidFill>
+          </a:ln>
         </p:spPr>
       </p:pic>
     </p:spTree>
@@ -19856,6 +20531,11 @@
           <a:prstGeom prst="rect">
             <a:avLst/>
           </a:prstGeom>
+          <a:ln>
+            <a:solidFill>
+              <a:schemeClr val="tx1"/>
+            </a:solidFill>
+          </a:ln>
         </p:spPr>
       </p:pic>
       <p:pic>
@@ -19886,6 +20566,11 @@
           <a:prstGeom prst="rect">
             <a:avLst/>
           </a:prstGeom>
+          <a:ln>
+            <a:solidFill>
+              <a:schemeClr val="tx1"/>
+            </a:solidFill>
+          </a:ln>
         </p:spPr>
       </p:pic>
     </p:spTree>
